--- a/docs/road_model_presentation_plan_1.pptx
+++ b/docs/road_model_presentation_plan_1.pptx
@@ -2037,7 +2037,7 @@
         </p:spPr>
         <p:txBody>
           <a:bodyPr wrap="none" lIns="25400" tIns="25400" rIns="25400" bIns="25400" rtlCol="0" anchor="t">
-            <a:normAutofit/>
+            <a:normAutofit lnSpcReduction="10000"/>
           </a:bodyPr>
           <a:lstStyle/>
           <a:p>
@@ -2131,7 +2131,7 @@
         </p:spPr>
         <p:txBody>
           <a:bodyPr wrap="square" lIns="25400" tIns="25400" rIns="25400" bIns="25400" rtlCol="0" anchor="t">
-            <a:normAutofit/>
+            <a:normAutofit lnSpcReduction="10000"/>
           </a:bodyPr>
           <a:lstStyle/>
           <a:p>
@@ -2172,7 +2172,7 @@
         </p:spPr>
         <p:txBody>
           <a:bodyPr wrap="square" lIns="25400" tIns="25400" rIns="25400" bIns="25400" rtlCol="0" anchor="t">
-            <a:normAutofit/>
+            <a:normAutofit fontScale="92500" lnSpcReduction="20000"/>
           </a:bodyPr>
           <a:lstStyle/>
           <a:p>
@@ -2235,7 +2235,7 @@
                 <a:ea typeface="Arial" pitchFamily="34" charset="-122"/>
                 <a:cs typeface="Arial" pitchFamily="34" charset="-120"/>
               </a:rPr>
-              <a:t>How APERC turns assumptions about vehicles, mileage and fuel into road transport energy demand — and how the model is prepared before it reaches LEAP.</a:t>
+              <a:t>How APERC turns assumptions into road energy demand and how the model is prepared before it reaches LEAP.</a:t>
             </a:r>
             <a:endParaRPr lang="en-US" sz="2550" dirty="0"/>
           </a:p>
@@ -2385,7 +2385,7 @@
         </p:spPr>
         <p:txBody>
           <a:bodyPr wrap="none" lIns="25400" tIns="25400" rIns="25400" bIns="25400" rtlCol="0" anchor="t">
-            <a:normAutofit/>
+            <a:normAutofit lnSpcReduction="10000"/>
           </a:bodyPr>
           <a:lstStyle/>
           <a:p>
@@ -2452,7 +2452,7 @@
         </p:spPr>
         <p:txBody>
           <a:bodyPr wrap="square" lIns="25400" tIns="25400" rIns="25400" bIns="25400" rtlCol="0" anchor="t">
-            <a:normAutofit/>
+            <a:normAutofit fontScale="92500" lnSpcReduction="20000"/>
           </a:bodyPr>
           <a:lstStyle/>
           <a:p>
@@ -2575,7 +2575,7 @@
         </p:nvSpPr>
         <p:spPr>
           <a:xfrm>
-            <a:off x="13400291" y="2177795"/>
+            <a:off x="13376099" y="2098314"/>
             <a:ext cx="4011410" cy="2391325"/>
           </a:xfrm>
           <a:prstGeom prst="rect">
@@ -2671,7 +2671,7 @@
                 <a:ea typeface="Arial" pitchFamily="34" charset="-122"/>
                 <a:cs typeface="Arial" pitchFamily="34" charset="-120"/>
               </a:rPr>
-              <a:t>Density sets how many values appear — start with the few that matter, reveal the rest only if you want them.</a:t>
+              <a:t>Density sets how many values appear — start with the few that matter, reveal the rest only if you want them. If you want more detail, let me know</a:t>
             </a:r>
             <a:endParaRPr lang="en-US" sz="1875" dirty="0"/>
           </a:p>
@@ -2685,7 +2685,7 @@
         </p:nvSpPr>
         <p:spPr>
           <a:xfrm>
-            <a:off x="13415271" y="4970899"/>
+            <a:off x="13470003" y="5566225"/>
             <a:ext cx="4011410" cy="2391325"/>
           </a:xfrm>
           <a:prstGeom prst="rect">
@@ -2740,7 +2740,7 @@
         </p:nvSpPr>
         <p:spPr>
           <a:xfrm>
-            <a:off x="13400291" y="6597059"/>
+            <a:off x="13430745" y="7318916"/>
             <a:ext cx="4011410" cy="2391325"/>
           </a:xfrm>
           <a:prstGeom prst="rect">
@@ -2781,9 +2781,8 @@
                 <a:ea typeface="Arial" pitchFamily="34" charset="-122"/>
                 <a:cs typeface="Arial" pitchFamily="34" charset="-120"/>
               </a:rPr>
-              <a:t>See how a change moves stock, sales and energy before anything reaches LEAP.</a:t>
-            </a:r>
-            <a:endParaRPr lang="en-US" sz="1875" dirty="0"/>
+              <a:t>See how a change moves stock, sales and energy before anything reaches LEAP. Iterate until you are happy</a:t>
+            </a:r>
           </a:p>
         </p:txBody>
       </p:sp>
@@ -2806,7 +2805,7 @@
         </p:spPr>
         <p:txBody>
           <a:bodyPr wrap="none" lIns="25400" tIns="25400" rIns="25400" bIns="25400" rtlCol="0" anchor="t">
-            <a:normAutofit/>
+            <a:normAutofit lnSpcReduction="10000"/>
           </a:bodyPr>
           <a:lstStyle/>
           <a:p>
@@ -2847,7 +2846,7 @@
         </p:spPr>
         <p:txBody>
           <a:bodyPr wrap="none" lIns="25400" tIns="25400" rIns="25400" bIns="25400" rtlCol="0" anchor="t">
-            <a:normAutofit/>
+            <a:normAutofit lnSpcReduction="10000"/>
           </a:bodyPr>
           <a:lstStyle/>
           <a:p>
@@ -2869,6 +2868,36 @@
           </a:p>
         </p:txBody>
       </p:sp>
+      <p:pic>
+        <p:nvPicPr>
+          <p:cNvPr id="9" name="Picture 8" descr="Like">
+            <a:extLst>
+              <a:ext uri="{FF2B5EF4-FFF2-40B4-BE49-F238E27FC236}">
+                <a16:creationId xmlns:a16="http://schemas.microsoft.com/office/drawing/2014/main" id="{A03CD71F-924C-0C2E-3160-DF96815E62EC}"/>
+              </a:ext>
+            </a:extLst>
+          </p:cNvPr>
+          <p:cNvPicPr>
+            <a:picLocks noChangeAspect="1"/>
+          </p:cNvPicPr>
+          <p:nvPr/>
+        </p:nvPicPr>
+        <p:blipFill>
+          <a:blip r:embed="rId5"/>
+          <a:stretch>
+            <a:fillRect/>
+          </a:stretch>
+        </p:blipFill>
+        <p:spPr>
+          <a:xfrm>
+            <a:off x="17123563" y="8332869"/>
+            <a:ext cx="752909" cy="752909"/>
+          </a:xfrm>
+          <a:prstGeom prst="rect">
+            <a:avLst/>
+          </a:prstGeom>
+        </p:spPr>
+      </p:pic>
     </p:spTree>
   </p:cSld>
   <p:clrMapOvr>
@@ -2921,7 +2950,7 @@
         </p:spPr>
         <p:txBody>
           <a:bodyPr wrap="none" lIns="25400" tIns="25400" rIns="25400" bIns="25400" rtlCol="0" anchor="t">
-            <a:normAutofit/>
+            <a:normAutofit lnSpcReduction="10000"/>
           </a:bodyPr>
           <a:lstStyle/>
           <a:p>
@@ -2988,7 +3017,7 @@
         </p:spPr>
         <p:txBody>
           <a:bodyPr wrap="square" lIns="25400" tIns="25400" rIns="25400" bIns="25400" rtlCol="0" anchor="t">
-            <a:normAutofit/>
+            <a:normAutofit fontScale="92500" lnSpcReduction="20000"/>
           </a:bodyPr>
           <a:lstStyle/>
           <a:p>
@@ -3059,7 +3088,7 @@
         </p:spPr>
         <p:txBody>
           <a:bodyPr wrap="square" lIns="25400" tIns="25400" rIns="25400" bIns="25400" rtlCol="0" anchor="t">
-            <a:normAutofit/>
+            <a:normAutofit fontScale="92500" lnSpcReduction="10000"/>
           </a:bodyPr>
           <a:lstStyle/>
           <a:p>
@@ -3103,7 +3132,7 @@
         </p:spPr>
         <p:txBody>
           <a:bodyPr wrap="square" lIns="25400" tIns="25400" rIns="25400" bIns="25400" rtlCol="0" anchor="t">
-            <a:normAutofit/>
+            <a:normAutofit fontScale="92500" lnSpcReduction="10000"/>
           </a:bodyPr>
           <a:lstStyle/>
           <a:p>
@@ -3185,7 +3214,7 @@
         </p:spPr>
         <p:txBody>
           <a:bodyPr wrap="square" lIns="25400" tIns="25400" rIns="25400" bIns="25400" rtlCol="0" anchor="t">
-            <a:normAutofit/>
+            <a:normAutofit fontScale="92500" lnSpcReduction="10000"/>
           </a:bodyPr>
           <a:lstStyle/>
           <a:p>
@@ -3267,7 +3296,7 @@
         </p:spPr>
         <p:txBody>
           <a:bodyPr wrap="square" lIns="25400" tIns="25400" rIns="25400" bIns="25400" rtlCol="0" anchor="t">
-            <a:normAutofit/>
+            <a:normAutofit fontScale="92500" lnSpcReduction="10000"/>
           </a:bodyPr>
           <a:lstStyle/>
           <a:p>
@@ -3457,7 +3486,7 @@
         </p:spPr>
         <p:txBody>
           <a:bodyPr wrap="square" lIns="25400" tIns="25400" rIns="25400" bIns="25400" rtlCol="0" anchor="t">
-            <a:normAutofit/>
+            <a:normAutofit lnSpcReduction="10000"/>
           </a:bodyPr>
           <a:lstStyle/>
           <a:p>
@@ -3498,7 +3527,7 @@
         </p:spPr>
         <p:txBody>
           <a:bodyPr wrap="square" lIns="25400" tIns="25400" rIns="25400" bIns="25400" rtlCol="0" anchor="t">
-            <a:normAutofit/>
+            <a:normAutofit fontScale="92500"/>
           </a:bodyPr>
           <a:lstStyle/>
           <a:p>
@@ -3564,7 +3593,7 @@
         </p:spPr>
         <p:txBody>
           <a:bodyPr wrap="none" lIns="25400" tIns="25400" rIns="25400" bIns="25400" rtlCol="0" anchor="t">
-            <a:normAutofit/>
+            <a:normAutofit lnSpcReduction="10000"/>
           </a:bodyPr>
           <a:lstStyle/>
           <a:p>
@@ -3605,7 +3634,7 @@
         </p:spPr>
         <p:txBody>
           <a:bodyPr wrap="none" lIns="25400" tIns="25400" rIns="25400" bIns="25400" rtlCol="0" anchor="t">
-            <a:normAutofit/>
+            <a:normAutofit lnSpcReduction="10000"/>
           </a:bodyPr>
           <a:lstStyle/>
           <a:p>
@@ -3679,7 +3708,7 @@
         </p:spPr>
         <p:txBody>
           <a:bodyPr wrap="none" lIns="25400" tIns="25400" rIns="25400" bIns="25400" rtlCol="0" anchor="t">
-            <a:normAutofit/>
+            <a:normAutofit lnSpcReduction="10000"/>
           </a:bodyPr>
           <a:lstStyle/>
           <a:p>
@@ -3831,7 +3860,7 @@
         </p:spPr>
         <p:txBody>
           <a:bodyPr wrap="none" lIns="25400" tIns="25400" rIns="25400" bIns="25400" rtlCol="0" anchor="t">
-            <a:normAutofit/>
+            <a:normAutofit lnSpcReduction="10000"/>
           </a:bodyPr>
           <a:lstStyle/>
           <a:p>
@@ -3898,7 +3927,7 @@
         </p:spPr>
         <p:txBody>
           <a:bodyPr wrap="square" lIns="25400" tIns="25400" rIns="25400" bIns="25400" rtlCol="0" anchor="t">
-            <a:normAutofit/>
+            <a:normAutofit fontScale="92500" lnSpcReduction="20000"/>
           </a:bodyPr>
           <a:lstStyle/>
           <a:p>
@@ -3969,7 +3998,7 @@
         </p:spPr>
         <p:txBody>
           <a:bodyPr wrap="square" lIns="25400" tIns="25400" rIns="25400" bIns="25400" rtlCol="0" anchor="t">
-            <a:normAutofit/>
+            <a:normAutofit fontScale="92500" lnSpcReduction="10000"/>
           </a:bodyPr>
           <a:lstStyle/>
           <a:p>
@@ -4148,7 +4177,7 @@
         </p:spPr>
         <p:txBody>
           <a:bodyPr wrap="square" lIns="25400" tIns="25400" rIns="25400" bIns="25400" rtlCol="0" anchor="t">
-            <a:normAutofit/>
+            <a:normAutofit lnSpcReduction="10000"/>
           </a:bodyPr>
           <a:lstStyle/>
           <a:p>
@@ -4189,7 +4218,7 @@
         </p:spPr>
         <p:txBody>
           <a:bodyPr wrap="square" lIns="25400" tIns="25400" rIns="25400" bIns="25400" rtlCol="0" anchor="t">
-            <a:normAutofit/>
+            <a:normAutofit fontScale="92500" lnSpcReduction="20000"/>
           </a:bodyPr>
           <a:lstStyle/>
           <a:p>
@@ -4233,7 +4262,7 @@
         </p:spPr>
         <p:txBody>
           <a:bodyPr wrap="square" lIns="25400" tIns="25400" rIns="25400" bIns="25400" rtlCol="0" anchor="t">
-            <a:normAutofit/>
+            <a:normAutofit fontScale="92500" lnSpcReduction="20000"/>
           </a:bodyPr>
           <a:lstStyle/>
           <a:p>
@@ -4277,7 +4306,7 @@
         </p:spPr>
         <p:txBody>
           <a:bodyPr wrap="square" lIns="25400" tIns="25400" rIns="25400" bIns="25400" rtlCol="0" anchor="t">
-            <a:normAutofit/>
+            <a:normAutofit fontScale="92500"/>
           </a:bodyPr>
           <a:lstStyle/>
           <a:p>
@@ -4467,7 +4496,7 @@
         </p:spPr>
         <p:txBody>
           <a:bodyPr wrap="square" lIns="25400" tIns="25400" rIns="25400" bIns="25400" rtlCol="0" anchor="t">
-            <a:normAutofit/>
+            <a:normAutofit lnSpcReduction="10000"/>
           </a:bodyPr>
           <a:lstStyle/>
           <a:p>
@@ -4508,7 +4537,7 @@
         </p:spPr>
         <p:txBody>
           <a:bodyPr wrap="square" lIns="25400" tIns="25400" rIns="25400" bIns="25400" rtlCol="0" anchor="t">
-            <a:normAutofit/>
+            <a:normAutofit fontScale="92500" lnSpcReduction="20000"/>
           </a:bodyPr>
           <a:lstStyle/>
           <a:p>
@@ -4552,7 +4581,7 @@
         </p:spPr>
         <p:txBody>
           <a:bodyPr wrap="square" lIns="25400" tIns="25400" rIns="25400" bIns="25400" rtlCol="0" anchor="t">
-            <a:normAutofit/>
+            <a:normAutofit fontScale="92500" lnSpcReduction="20000"/>
           </a:bodyPr>
           <a:lstStyle/>
           <a:p>
@@ -4596,7 +4625,7 @@
         </p:spPr>
         <p:txBody>
           <a:bodyPr wrap="square" lIns="25400" tIns="25400" rIns="25400" bIns="25400" rtlCol="0" anchor="t">
-            <a:normAutofit/>
+            <a:normAutofit fontScale="92500" lnSpcReduction="20000"/>
           </a:bodyPr>
           <a:lstStyle/>
           <a:p>
@@ -4651,7 +4680,7 @@
         </p:spPr>
         <p:txBody>
           <a:bodyPr wrap="none" lIns="25400" tIns="25400" rIns="25400" bIns="25400" rtlCol="0" anchor="t">
-            <a:normAutofit/>
+            <a:normAutofit lnSpcReduction="10000"/>
           </a:bodyPr>
           <a:lstStyle/>
           <a:p>
@@ -4692,7 +4721,7 @@
         </p:spPr>
         <p:txBody>
           <a:bodyPr wrap="none" lIns="25400" tIns="25400" rIns="25400" bIns="25400" rtlCol="0" anchor="t">
-            <a:normAutofit/>
+            <a:normAutofit lnSpcReduction="10000"/>
           </a:bodyPr>
           <a:lstStyle/>
           <a:p>
@@ -4766,7 +4795,7 @@
         </p:spPr>
         <p:txBody>
           <a:bodyPr wrap="none" lIns="25400" tIns="25400" rIns="25400" bIns="25400" rtlCol="0" anchor="t">
-            <a:normAutofit/>
+            <a:normAutofit lnSpcReduction="10000"/>
           </a:bodyPr>
           <a:lstStyle/>
           <a:p>
@@ -4833,7 +4862,7 @@
         </p:spPr>
         <p:txBody>
           <a:bodyPr wrap="square" lIns="25400" tIns="25400" rIns="25400" bIns="25400" rtlCol="0" anchor="t">
-            <a:normAutofit/>
+            <a:normAutofit fontScale="92500" lnSpcReduction="20000"/>
           </a:bodyPr>
           <a:lstStyle/>
           <a:p>
@@ -5039,7 +5068,7 @@
         </p:spPr>
         <p:txBody>
           <a:bodyPr wrap="square" lIns="25400" tIns="25400" rIns="25400" bIns="25400" rtlCol="0" anchor="t">
-            <a:normAutofit/>
+            <a:normAutofit lnSpcReduction="10000"/>
           </a:bodyPr>
           <a:lstStyle/>
           <a:p>
@@ -5240,7 +5269,7 @@
         </p:nvSpPr>
         <p:spPr>
           <a:xfrm>
-            <a:off x="9305892" y="2023776"/>
+            <a:off x="9305892" y="2044943"/>
             <a:ext cx="8029609" cy="7300516"/>
           </a:xfrm>
           <a:prstGeom prst="rect">
@@ -5386,7 +5415,7 @@
         </p:spPr>
         <p:txBody>
           <a:bodyPr wrap="square" lIns="25400" tIns="25400" rIns="25400" bIns="25400" rtlCol="0" anchor="t">
-            <a:normAutofit/>
+            <a:normAutofit lnSpcReduction="10000"/>
           </a:bodyPr>
           <a:lstStyle/>
           <a:p>
@@ -5647,6 +5676,89 @@
           </a:bodyPr>
           <a:lstStyle/>
           <a:p>
+            <a:pPr marL="285750" indent="-285750">
+              <a:lnSpc>
+                <a:spcPct val="132000"/>
+              </a:lnSpc>
+              <a:buFont typeface="Arial" panose="020B0604020202020204" pitchFamily="34" charset="0"/>
+              <a:buChar char="•"/>
+            </a:pPr>
+            <a:r>
+              <a:rPr lang="en-US" sz="1800" dirty="0">
+                <a:solidFill>
+                  <a:srgbClr val="44546A"/>
+                </a:solidFill>
+                <a:latin typeface="Arial" pitchFamily="34" charset="0"/>
+                <a:ea typeface="Arial" pitchFamily="34" charset="-122"/>
+                <a:cs typeface="Arial" pitchFamily="34" charset="-120"/>
+              </a:rPr>
+              <a:t>Fuel or device shares</a:t>
+            </a:r>
+            <a:r>
+              <a:rPr lang="en-US" dirty="0">
+                <a:solidFill>
+                  <a:srgbClr val="7E8896"/>
+                </a:solidFill>
+                <a:latin typeface="Arial" pitchFamily="34" charset="0"/>
+                <a:ea typeface="Arial" pitchFamily="34" charset="-122"/>
+                <a:cs typeface="Arial" pitchFamily="34" charset="-120"/>
+              </a:rPr>
+              <a:t> — avoid adjusting PHEV utilization shares</a:t>
+            </a:r>
+            <a:endParaRPr lang="en-US" sz="1800" dirty="0"/>
+          </a:p>
+        </p:txBody>
+      </p:sp>
+      <p:sp>
+        <p:nvSpPr>
+          <p:cNvPr id="26" name="Shape 23"/>
+          <p:cNvSpPr/>
+          <p:nvPr/>
+        </p:nvSpPr>
+        <p:spPr>
+          <a:xfrm>
+            <a:off x="9659277" y="4882434"/>
+            <a:ext cx="7322840" cy="10583"/>
+          </a:xfrm>
+          <a:prstGeom prst="rect">
+            <a:avLst/>
+          </a:prstGeom>
+          <a:solidFill>
+            <a:srgbClr val="CFE0F5"/>
+          </a:solidFill>
+          <a:ln/>
+        </p:spPr>
+        <p:txBody>
+          <a:bodyPr/>
+          <a:lstStyle/>
+          <a:p>
+            <a:endParaRPr lang="en-NZ"/>
+          </a:p>
+        </p:txBody>
+      </p:sp>
+      <p:sp>
+        <p:nvSpPr>
+          <p:cNvPr id="27" name="Text 24"/>
+          <p:cNvSpPr/>
+          <p:nvPr/>
+        </p:nvSpPr>
+        <p:spPr>
+          <a:xfrm>
+            <a:off x="9659277" y="4997792"/>
+            <a:ext cx="7542525" cy="339527"/>
+          </a:xfrm>
+          <a:prstGeom prst="rect">
+            <a:avLst/>
+          </a:prstGeom>
+          <a:noFill/>
+          <a:ln/>
+        </p:spPr>
+        <p:txBody>
+          <a:bodyPr wrap="square" lIns="25400" tIns="25400" rIns="25400" bIns="25400" rtlCol="0" anchor="t">
+            <a:normAutofit fontScale="92500" lnSpcReduction="20000"/>
+          </a:bodyPr>
+          <a:lstStyle/>
+          <a:p>
             <a:pPr marL="285750" indent="-285750" algn="l">
               <a:lnSpc>
                 <a:spcPct val="132000"/>
@@ -5663,83 +5775,11 @@
                 <a:ea typeface="Arial" pitchFamily="34" charset="-122"/>
                 <a:cs typeface="Arial" pitchFamily="34" charset="-120"/>
               </a:rPr>
-              <a:t>Fuel or device shares</a:t>
-            </a:r>
-            <a:endParaRPr lang="en-US" sz="1800" dirty="0"/>
-          </a:p>
-        </p:txBody>
-      </p:sp>
-      <p:sp>
-        <p:nvSpPr>
-          <p:cNvPr id="26" name="Shape 23"/>
-          <p:cNvSpPr/>
-          <p:nvPr/>
-        </p:nvSpPr>
-        <p:spPr>
-          <a:xfrm>
-            <a:off x="9659277" y="4882434"/>
-            <a:ext cx="7322840" cy="10583"/>
-          </a:xfrm>
-          <a:prstGeom prst="rect">
-            <a:avLst/>
-          </a:prstGeom>
-          <a:solidFill>
-            <a:srgbClr val="CFE0F5"/>
-          </a:solidFill>
-          <a:ln/>
-        </p:spPr>
-        <p:txBody>
-          <a:bodyPr/>
-          <a:lstStyle/>
-          <a:p>
-            <a:endParaRPr lang="en-NZ"/>
-          </a:p>
-        </p:txBody>
-      </p:sp>
-      <p:sp>
-        <p:nvSpPr>
-          <p:cNvPr id="27" name="Text 24"/>
-          <p:cNvSpPr/>
-          <p:nvPr/>
-        </p:nvSpPr>
-        <p:spPr>
-          <a:xfrm>
-            <a:off x="9659277" y="4997792"/>
-            <a:ext cx="7542525" cy="339527"/>
-          </a:xfrm>
-          <a:prstGeom prst="rect">
-            <a:avLst/>
-          </a:prstGeom>
-          <a:noFill/>
-          <a:ln/>
-        </p:spPr>
-        <p:txBody>
-          <a:bodyPr wrap="square" lIns="25400" tIns="25400" rIns="25400" bIns="25400" rtlCol="0" anchor="t">
-            <a:normAutofit fontScale="92500" lnSpcReduction="20000"/>
-          </a:bodyPr>
-          <a:lstStyle/>
-          <a:p>
-            <a:pPr marL="285750" indent="-285750" algn="l">
-              <a:lnSpc>
-                <a:spcPct val="132000"/>
-              </a:lnSpc>
-              <a:buFont typeface="Arial" panose="020B0604020202020204" pitchFamily="34" charset="0"/>
-              <a:buChar char="•"/>
-            </a:pPr>
+              <a:t>Scrappage &amp; accelerated retirement </a:t>
+            </a:r>
             <a:r>
               <a:rPr lang="en-US" sz="1800" dirty="0">
                 <a:solidFill>
-                  <a:srgbClr val="44546A"/>
-                </a:solidFill>
-                <a:latin typeface="Arial" pitchFamily="34" charset="0"/>
-                <a:ea typeface="Arial" pitchFamily="34" charset="-122"/>
-                <a:cs typeface="Arial" pitchFamily="34" charset="-120"/>
-              </a:rPr>
-              <a:t>Scrappage &amp; accelerated retirement </a:t>
-            </a:r>
-            <a:r>
-              <a:rPr lang="en-US" sz="1800" dirty="0">
-                <a:solidFill>
                   <a:srgbClr val="7E8896"/>
                 </a:solidFill>
                 <a:latin typeface="Arial" pitchFamily="34" charset="0"/>
@@ -5747,50 +5787,6 @@
                 <a:cs typeface="Arial" pitchFamily="34" charset="-120"/>
               </a:rPr>
               <a:t>— still needs testing</a:t>
-            </a:r>
-            <a:endParaRPr lang="en-US" sz="1800" dirty="0"/>
-          </a:p>
-        </p:txBody>
-      </p:sp>
-      <p:sp>
-        <p:nvSpPr>
-          <p:cNvPr id="28" name="Text 25"/>
-          <p:cNvSpPr/>
-          <p:nvPr/>
-        </p:nvSpPr>
-        <p:spPr>
-          <a:xfrm>
-            <a:off x="9659277" y="8350428"/>
-            <a:ext cx="7542525" cy="677598"/>
-          </a:xfrm>
-          <a:prstGeom prst="rect">
-            <a:avLst/>
-          </a:prstGeom>
-          <a:noFill/>
-          <a:ln/>
-        </p:spPr>
-        <p:txBody>
-          <a:bodyPr wrap="square" lIns="25400" tIns="25400" rIns="25400" bIns="25400" rtlCol="0" anchor="t">
-            <a:normAutofit/>
-          </a:bodyPr>
-          <a:lstStyle/>
-          <a:p>
-            <a:pPr marL="0" indent="0" algn="l">
-              <a:lnSpc>
-                <a:spcPct val="140000"/>
-              </a:lnSpc>
-              <a:buNone/>
-            </a:pPr>
-            <a:r>
-              <a:rPr lang="en-US" sz="1800" dirty="0">
-                <a:solidFill>
-                  <a:srgbClr val="7E8896"/>
-                </a:solidFill>
-                <a:latin typeface="Arial" pitchFamily="34" charset="0"/>
-                <a:ea typeface="Arial" pitchFamily="34" charset="-122"/>
-                <a:cs typeface="Arial" pitchFamily="34" charset="-120"/>
-              </a:rPr>
-              <a:t>One structural change can move stock, sales, retirements and energy together — so it is prepared before LEAP.</a:t>
             </a:r>
             <a:endParaRPr lang="en-US" sz="1800" dirty="0"/>
           </a:p>
@@ -5815,7 +5811,7 @@
         </p:spPr>
         <p:txBody>
           <a:bodyPr wrap="none" lIns="25400" tIns="25400" rIns="25400" bIns="25400" rtlCol="0" anchor="t">
-            <a:normAutofit/>
+            <a:normAutofit lnSpcReduction="10000"/>
           </a:bodyPr>
           <a:lstStyle/>
           <a:p>
@@ -5856,7 +5852,7 @@
         </p:spPr>
         <p:txBody>
           <a:bodyPr wrap="none" lIns="25400" tIns="25400" rIns="25400" bIns="25400" rtlCol="0" anchor="t">
-            <a:normAutofit/>
+            <a:normAutofit lnSpcReduction="10000"/>
           </a:bodyPr>
           <a:lstStyle/>
           <a:p>
@@ -5875,6 +5871,41 @@
               <a:t>14</a:t>
             </a:r>
             <a:endParaRPr lang="en-US" sz="1350" dirty="0"/>
+          </a:p>
+        </p:txBody>
+      </p:sp>
+      <p:sp>
+        <p:nvSpPr>
+          <p:cNvPr id="31" name="TextBox 30">
+            <a:extLst>
+              <a:ext uri="{FF2B5EF4-FFF2-40B4-BE49-F238E27FC236}">
+                <a16:creationId xmlns:a16="http://schemas.microsoft.com/office/drawing/2014/main" id="{EDB38049-A6C4-2786-ED43-821AA59BB137}"/>
+              </a:ext>
+            </a:extLst>
+          </p:cNvPr>
+          <p:cNvSpPr txBox="1"/>
+          <p:nvPr/>
+        </p:nvSpPr>
+        <p:spPr>
+          <a:xfrm>
+            <a:off x="9530701" y="8718865"/>
+            <a:ext cx="8531429" cy="461665"/>
+          </a:xfrm>
+          <a:prstGeom prst="rect">
+            <a:avLst/>
+          </a:prstGeom>
+          <a:noFill/>
+        </p:spPr>
+        <p:txBody>
+          <a:bodyPr wrap="square" rtlCol="0">
+            <a:spAutoFit/>
+          </a:bodyPr>
+          <a:lstStyle/>
+          <a:p>
+            <a:r>
+              <a:rPr lang="en-NZ" sz="2400" b="1" i="1" dirty="0"/>
+              <a:t>Be careful not to adjust pre-leap variables within LEAP!</a:t>
+            </a:r>
           </a:p>
         </p:txBody>
       </p:sp>
@@ -5930,7 +5961,7 @@
         </p:spPr>
         <p:txBody>
           <a:bodyPr wrap="none" lIns="25400" tIns="25400" rIns="25400" bIns="25400" rtlCol="0" anchor="t">
-            <a:normAutofit/>
+            <a:normAutofit lnSpcReduction="10000"/>
           </a:bodyPr>
           <a:lstStyle/>
           <a:p>
@@ -5997,7 +6028,7 @@
         </p:spPr>
         <p:txBody>
           <a:bodyPr wrap="square" lIns="25400" tIns="25400" rIns="25400" bIns="25400" rtlCol="0" anchor="t">
-            <a:normAutofit/>
+            <a:normAutofit fontScale="92500" lnSpcReduction="20000"/>
           </a:bodyPr>
           <a:lstStyle/>
           <a:p>
@@ -6112,7 +6143,7 @@
         </p:spPr>
         <p:txBody>
           <a:bodyPr wrap="square" lIns="25400" tIns="25400" rIns="25400" bIns="25400" rtlCol="0" anchor="t">
-            <a:normAutofit/>
+            <a:normAutofit fontScale="92500"/>
           </a:bodyPr>
           <a:lstStyle/>
           <a:p>
@@ -6313,7 +6344,7 @@
         </p:spPr>
         <p:txBody>
           <a:bodyPr wrap="square" lIns="25400" tIns="25400" rIns="25400" bIns="25400" rtlCol="0" anchor="t">
-            <a:normAutofit/>
+            <a:normAutofit lnSpcReduction="10000"/>
           </a:bodyPr>
           <a:lstStyle/>
           <a:p>
@@ -6354,7 +6385,7 @@
         </p:spPr>
         <p:txBody>
           <a:bodyPr wrap="square" lIns="25400" tIns="25400" rIns="25400" bIns="25400" rtlCol="0" anchor="t">
-            <a:normAutofit/>
+            <a:normAutofit fontScale="92500" lnSpcReduction="20000"/>
           </a:bodyPr>
           <a:lstStyle/>
           <a:p>
@@ -6398,7 +6429,7 @@
         </p:spPr>
         <p:txBody>
           <a:bodyPr wrap="none" lIns="25400" tIns="25400" rIns="25400" bIns="25400" rtlCol="0" anchor="t">
-            <a:normAutofit/>
+            <a:normAutofit lnSpcReduction="10000"/>
           </a:bodyPr>
           <a:lstStyle/>
           <a:p>
@@ -6439,7 +6470,7 @@
         </p:spPr>
         <p:txBody>
           <a:bodyPr wrap="none" lIns="25400" tIns="25400" rIns="25400" bIns="25400" rtlCol="0" anchor="t">
-            <a:normAutofit/>
+            <a:normAutofit lnSpcReduction="10000"/>
           </a:bodyPr>
           <a:lstStyle/>
           <a:p>
@@ -6513,7 +6544,7 @@
         </p:spPr>
         <p:txBody>
           <a:bodyPr wrap="none" lIns="25400" tIns="25400" rIns="25400" bIns="25400" rtlCol="0" anchor="t">
-            <a:normAutofit/>
+            <a:normAutofit lnSpcReduction="10000"/>
           </a:bodyPr>
           <a:lstStyle/>
           <a:p>
@@ -6580,7 +6611,7 @@
         </p:spPr>
         <p:txBody>
           <a:bodyPr wrap="square" lIns="25400" tIns="25400" rIns="25400" bIns="25400" rtlCol="0" anchor="t">
-            <a:normAutofit/>
+            <a:normAutofit fontScale="92500" lnSpcReduction="20000"/>
           </a:bodyPr>
           <a:lstStyle/>
           <a:p>
@@ -6651,7 +6682,7 @@
         </p:spPr>
         <p:txBody>
           <a:bodyPr wrap="square" lIns="25400" tIns="25400" rIns="25400" bIns="25400" rtlCol="0" anchor="t">
-            <a:normAutofit/>
+            <a:normAutofit fontScale="92500" lnSpcReduction="10000"/>
           </a:bodyPr>
           <a:lstStyle/>
           <a:p>
@@ -6830,7 +6861,7 @@
         </p:spPr>
         <p:txBody>
           <a:bodyPr wrap="square" lIns="25400" tIns="25400" rIns="25400" bIns="25400" rtlCol="0" anchor="t">
-            <a:normAutofit/>
+            <a:normAutofit lnSpcReduction="10000"/>
           </a:bodyPr>
           <a:lstStyle/>
           <a:p>
@@ -6871,7 +6902,7 @@
         </p:spPr>
         <p:txBody>
           <a:bodyPr wrap="square" lIns="25400" tIns="25400" rIns="25400" bIns="25400" rtlCol="0" anchor="t">
-            <a:normAutofit/>
+            <a:normAutofit fontScale="92500" lnSpcReduction="20000"/>
           </a:bodyPr>
           <a:lstStyle/>
           <a:p>
@@ -6915,7 +6946,7 @@
         </p:spPr>
         <p:txBody>
           <a:bodyPr wrap="square" lIns="25400" tIns="25400" rIns="25400" bIns="25400" rtlCol="0" anchor="t">
-            <a:normAutofit/>
+            <a:normAutofit fontScale="92500" lnSpcReduction="20000"/>
           </a:bodyPr>
           <a:lstStyle/>
           <a:p>
@@ -7094,7 +7125,7 @@
         </p:spPr>
         <p:txBody>
           <a:bodyPr wrap="square" lIns="25400" tIns="25400" rIns="25400" bIns="25400" rtlCol="0" anchor="t">
-            <a:normAutofit/>
+            <a:normAutofit lnSpcReduction="10000"/>
           </a:bodyPr>
           <a:lstStyle/>
           <a:p>
@@ -7135,7 +7166,7 @@
         </p:spPr>
         <p:txBody>
           <a:bodyPr wrap="square" lIns="25400" tIns="25400" rIns="25400" bIns="25400" rtlCol="0" anchor="t">
-            <a:normAutofit/>
+            <a:normAutofit fontScale="92500" lnSpcReduction="20000"/>
           </a:bodyPr>
           <a:lstStyle/>
           <a:p>
@@ -7358,7 +7389,7 @@
         </p:spPr>
         <p:txBody>
           <a:bodyPr wrap="square" lIns="25400" tIns="25400" rIns="25400" bIns="25400" rtlCol="0" anchor="t">
-            <a:normAutofit/>
+            <a:normAutofit lnSpcReduction="10000"/>
           </a:bodyPr>
           <a:lstStyle/>
           <a:p>
@@ -7399,7 +7430,7 @@
         </p:spPr>
         <p:txBody>
           <a:bodyPr wrap="square" lIns="25400" tIns="25400" rIns="25400" bIns="25400" rtlCol="0" anchor="t">
-            <a:normAutofit/>
+            <a:normAutofit fontScale="92500" lnSpcReduction="20000"/>
           </a:bodyPr>
           <a:lstStyle/>
           <a:p>
@@ -7443,7 +7474,7 @@
         </p:spPr>
         <p:txBody>
           <a:bodyPr wrap="square" lIns="25400" tIns="25400" rIns="25400" bIns="25400" rtlCol="0" anchor="t">
-            <a:normAutofit/>
+            <a:normAutofit fontScale="92500" lnSpcReduction="20000"/>
           </a:bodyPr>
           <a:lstStyle/>
           <a:p>
@@ -7487,7 +7518,7 @@
         </p:spPr>
         <p:txBody>
           <a:bodyPr wrap="square" lIns="25400" tIns="25400" rIns="25400" bIns="25400" rtlCol="0" anchor="t">
-            <a:normAutofit/>
+            <a:normAutofit fontScale="92500" lnSpcReduction="20000"/>
           </a:bodyPr>
           <a:lstStyle/>
           <a:p>
@@ -7531,7 +7562,7 @@
         </p:spPr>
         <p:txBody>
           <a:bodyPr wrap="none" lIns="25400" tIns="25400" rIns="25400" bIns="25400" rtlCol="0" anchor="t">
-            <a:normAutofit/>
+            <a:normAutofit lnSpcReduction="10000"/>
           </a:bodyPr>
           <a:lstStyle/>
           <a:p>
@@ -7572,7 +7603,7 @@
         </p:spPr>
         <p:txBody>
           <a:bodyPr wrap="none" lIns="25400" tIns="25400" rIns="25400" bIns="25400" rtlCol="0" anchor="t">
-            <a:normAutofit/>
+            <a:normAutofit lnSpcReduction="10000"/>
           </a:bodyPr>
           <a:lstStyle/>
           <a:p>
@@ -7646,7 +7677,7 @@
         </p:spPr>
         <p:txBody>
           <a:bodyPr wrap="none" lIns="25400" tIns="25400" rIns="25400" bIns="25400" rtlCol="0" anchor="t">
-            <a:normAutofit/>
+            <a:normAutofit lnSpcReduction="10000"/>
           </a:bodyPr>
           <a:lstStyle/>
           <a:p>
@@ -7713,7 +7744,7 @@
         </p:spPr>
         <p:txBody>
           <a:bodyPr wrap="square" lIns="25400" tIns="25400" rIns="25400" bIns="25400" rtlCol="0" anchor="t">
-            <a:normAutofit/>
+            <a:normAutofit fontScale="92500" lnSpcReduction="20000"/>
           </a:bodyPr>
           <a:lstStyle/>
           <a:p>
@@ -7919,7 +7950,7 @@
         </p:spPr>
         <p:txBody>
           <a:bodyPr wrap="square" lIns="25400" tIns="25400" rIns="25400" bIns="25400" rtlCol="0" anchor="t">
-            <a:normAutofit/>
+            <a:normAutofit lnSpcReduction="10000"/>
           </a:bodyPr>
           <a:lstStyle/>
           <a:p>
@@ -7960,7 +7991,7 @@
         </p:spPr>
         <p:txBody>
           <a:bodyPr wrap="square" lIns="25400" tIns="25400" rIns="25400" bIns="25400" rtlCol="0" anchor="t">
-            <a:normAutofit/>
+            <a:normAutofit fontScale="92500" lnSpcReduction="20000"/>
           </a:bodyPr>
           <a:lstStyle/>
           <a:p>
@@ -8004,7 +8035,7 @@
         </p:spPr>
         <p:txBody>
           <a:bodyPr wrap="square" lIns="25400" tIns="25400" rIns="25400" bIns="25400" rtlCol="0" anchor="t">
-            <a:normAutofit/>
+            <a:normAutofit fontScale="92500" lnSpcReduction="20000"/>
           </a:bodyPr>
           <a:lstStyle/>
           <a:p>
@@ -8183,7 +8214,7 @@
         </p:spPr>
         <p:txBody>
           <a:bodyPr wrap="square" lIns="25400" tIns="25400" rIns="25400" bIns="25400" rtlCol="0" anchor="t">
-            <a:normAutofit/>
+            <a:normAutofit lnSpcReduction="10000"/>
           </a:bodyPr>
           <a:lstStyle/>
           <a:p>
@@ -8224,7 +8255,7 @@
         </p:spPr>
         <p:txBody>
           <a:bodyPr wrap="square" lIns="25400" tIns="25400" rIns="25400" bIns="25400" rtlCol="0" anchor="t">
-            <a:normAutofit/>
+            <a:normAutofit fontScale="92500" lnSpcReduction="20000"/>
           </a:bodyPr>
           <a:lstStyle/>
           <a:p>
@@ -8268,7 +8299,7 @@
         </p:spPr>
         <p:txBody>
           <a:bodyPr wrap="square" lIns="25400" tIns="25400" rIns="25400" bIns="25400" rtlCol="0" anchor="t">
-            <a:normAutofit/>
+            <a:normAutofit fontScale="92500" lnSpcReduction="20000"/>
           </a:bodyPr>
           <a:lstStyle/>
           <a:p>
@@ -8447,7 +8478,7 @@
         </p:spPr>
         <p:txBody>
           <a:bodyPr wrap="square" lIns="25400" tIns="25400" rIns="25400" bIns="25400" rtlCol="0" anchor="t">
-            <a:normAutofit/>
+            <a:normAutofit lnSpcReduction="10000"/>
           </a:bodyPr>
           <a:lstStyle/>
           <a:p>
@@ -8488,7 +8519,7 @@
         </p:spPr>
         <p:txBody>
           <a:bodyPr wrap="square" lIns="25400" tIns="25400" rIns="25400" bIns="25400" rtlCol="0" anchor="t">
-            <a:normAutofit/>
+            <a:normAutofit fontScale="92500" lnSpcReduction="20000"/>
           </a:bodyPr>
           <a:lstStyle/>
           <a:p>
@@ -8532,7 +8563,7 @@
         </p:spPr>
         <p:txBody>
           <a:bodyPr wrap="square" lIns="25400" tIns="25400" rIns="25400" bIns="25400" rtlCol="0" anchor="t">
-            <a:normAutofit/>
+            <a:normAutofit fontScale="92500" lnSpcReduction="20000"/>
           </a:bodyPr>
           <a:lstStyle/>
           <a:p>
@@ -8701,7 +8732,7 @@
         </p:spPr>
         <p:txBody>
           <a:bodyPr wrap="none" lIns="25400" tIns="25400" rIns="25400" bIns="25400" rtlCol="0" anchor="t">
-            <a:normAutofit/>
+            <a:normAutofit lnSpcReduction="10000"/>
           </a:bodyPr>
           <a:lstStyle/>
           <a:p>
@@ -8768,7 +8799,7 @@
         </p:spPr>
         <p:txBody>
           <a:bodyPr wrap="square" lIns="25400" tIns="25400" rIns="25400" bIns="25400" rtlCol="0" anchor="t">
-            <a:normAutofit/>
+            <a:normAutofit fontScale="92500" lnSpcReduction="20000"/>
           </a:bodyPr>
           <a:lstStyle/>
           <a:p>
@@ -8839,7 +8870,7 @@
         </p:spPr>
         <p:txBody>
           <a:bodyPr wrap="square" lIns="25400" tIns="25400" rIns="25400" bIns="25400" rtlCol="0" anchor="t">
-            <a:normAutofit/>
+            <a:normAutofit fontScale="92500" lnSpcReduction="10000"/>
           </a:bodyPr>
           <a:lstStyle/>
           <a:p>
@@ -8883,7 +8914,7 @@
         </p:spPr>
         <p:txBody>
           <a:bodyPr wrap="square" lIns="25400" tIns="25400" rIns="25400" bIns="25400" rtlCol="0" anchor="t">
-            <a:normAutofit/>
+            <a:normAutofit lnSpcReduction="10000"/>
           </a:bodyPr>
           <a:lstStyle/>
           <a:p>
@@ -8924,7 +8955,7 @@
         </p:spPr>
         <p:txBody>
           <a:bodyPr wrap="square" lIns="25400" tIns="25400" rIns="25400" bIns="25400" rtlCol="0" anchor="t">
-            <a:normAutofit/>
+            <a:normAutofit fontScale="92500" lnSpcReduction="10000"/>
           </a:bodyPr>
           <a:lstStyle/>
           <a:p>
@@ -8990,7 +9021,7 @@
         </p:spPr>
         <p:txBody>
           <a:bodyPr wrap="square" lIns="25400" tIns="25400" rIns="25400" bIns="25400" rtlCol="0" anchor="t">
-            <a:normAutofit/>
+            <a:normAutofit lnSpcReduction="10000"/>
           </a:bodyPr>
           <a:lstStyle/>
           <a:p>
@@ -9031,7 +9062,7 @@
         </p:spPr>
         <p:txBody>
           <a:bodyPr wrap="square" lIns="25400" tIns="25400" rIns="25400" bIns="25400" rtlCol="0" anchor="t">
-            <a:normAutofit/>
+            <a:normAutofit fontScale="92500" lnSpcReduction="10000"/>
           </a:bodyPr>
           <a:lstStyle/>
           <a:p>
@@ -9113,7 +9144,7 @@
         </p:spPr>
         <p:txBody>
           <a:bodyPr wrap="square" lIns="25400" tIns="25400" rIns="25400" bIns="25400" rtlCol="0" anchor="t">
-            <a:normAutofit/>
+            <a:normAutofit fontScale="92500" lnSpcReduction="10000"/>
           </a:bodyPr>
           <a:lstStyle/>
           <a:p>
@@ -9195,7 +9226,7 @@
         </p:spPr>
         <p:txBody>
           <a:bodyPr wrap="square" lIns="25400" tIns="25400" rIns="25400" bIns="25400" rtlCol="0" anchor="t">
-            <a:normAutofit/>
+            <a:normAutofit fontScale="92500" lnSpcReduction="10000"/>
           </a:bodyPr>
           <a:lstStyle/>
           <a:p>
@@ -9250,7 +9281,7 @@
         </p:spPr>
         <p:txBody>
           <a:bodyPr wrap="none" lIns="25400" tIns="25400" rIns="25400" bIns="25400" rtlCol="0" anchor="t">
-            <a:normAutofit/>
+            <a:normAutofit lnSpcReduction="10000"/>
           </a:bodyPr>
           <a:lstStyle/>
           <a:p>
@@ -9291,7 +9322,7 @@
         </p:spPr>
         <p:txBody>
           <a:bodyPr wrap="none" lIns="25400" tIns="25400" rIns="25400" bIns="25400" rtlCol="0" anchor="t">
-            <a:normAutofit/>
+            <a:normAutofit lnSpcReduction="10000"/>
           </a:bodyPr>
           <a:lstStyle/>
           <a:p>
@@ -9365,7 +9396,7 @@
         </p:spPr>
         <p:txBody>
           <a:bodyPr wrap="none" lIns="25400" tIns="25400" rIns="25400" bIns="25400" rtlCol="0" anchor="t">
-            <a:normAutofit/>
+            <a:normAutofit lnSpcReduction="10000"/>
           </a:bodyPr>
           <a:lstStyle/>
           <a:p>
@@ -9432,7 +9463,7 @@
         </p:spPr>
         <p:txBody>
           <a:bodyPr wrap="square" lIns="25400" tIns="25400" rIns="25400" bIns="25400" rtlCol="0" anchor="t">
-            <a:normAutofit/>
+            <a:normAutofit fontScale="92500" lnSpcReduction="20000"/>
           </a:bodyPr>
           <a:lstStyle/>
           <a:p>
@@ -9544,7 +9575,7 @@
         </p:spPr>
         <p:txBody>
           <a:bodyPr wrap="square" lIns="25400" tIns="25400" rIns="25400" bIns="25400" rtlCol="0" anchor="t">
-            <a:normAutofit/>
+            <a:normAutofit lnSpcReduction="10000"/>
           </a:bodyPr>
           <a:lstStyle/>
           <a:p>
@@ -9626,7 +9657,7 @@
         </p:spPr>
         <p:txBody>
           <a:bodyPr wrap="square" lIns="25400" tIns="25400" rIns="25400" bIns="25400" rtlCol="0" anchor="t">
-            <a:normAutofit/>
+            <a:normAutofit lnSpcReduction="10000"/>
           </a:bodyPr>
           <a:lstStyle/>
           <a:p>
@@ -9708,7 +9739,7 @@
         </p:spPr>
         <p:txBody>
           <a:bodyPr wrap="square" lIns="25400" tIns="25400" rIns="25400" bIns="25400" rtlCol="0" anchor="t">
-            <a:normAutofit/>
+            <a:normAutofit lnSpcReduction="10000"/>
           </a:bodyPr>
           <a:lstStyle/>
           <a:p>
@@ -9790,7 +9821,7 @@
         </p:spPr>
         <p:txBody>
           <a:bodyPr wrap="square" lIns="25400" tIns="25400" rIns="25400" bIns="25400" rtlCol="0" anchor="t">
-            <a:normAutofit/>
+            <a:normAutofit lnSpcReduction="10000"/>
           </a:bodyPr>
           <a:lstStyle/>
           <a:p>
@@ -9831,7 +9862,7 @@
         </p:spPr>
         <p:txBody>
           <a:bodyPr wrap="square" lIns="25400" tIns="25400" rIns="25400" bIns="25400" rtlCol="0" anchor="t">
-            <a:normAutofit/>
+            <a:normAutofit lnSpcReduction="10000"/>
           </a:bodyPr>
           <a:lstStyle/>
           <a:p>
@@ -9872,7 +9903,7 @@
         </p:spPr>
         <p:txBody>
           <a:bodyPr wrap="square" lIns="25400" tIns="25400" rIns="25400" bIns="25400" rtlCol="0" anchor="t">
-            <a:normAutofit/>
+            <a:normAutofit lnSpcReduction="10000"/>
           </a:bodyPr>
           <a:lstStyle/>
           <a:p>
@@ -9913,7 +9944,7 @@
         </p:spPr>
         <p:txBody>
           <a:bodyPr wrap="square" lIns="25400" tIns="25400" rIns="25400" bIns="25400" rtlCol="0" anchor="t">
-            <a:normAutofit/>
+            <a:normAutofit fontScale="92500" lnSpcReduction="10000"/>
           </a:bodyPr>
           <a:lstStyle/>
           <a:p>
@@ -9957,7 +9988,7 @@
         </p:spPr>
         <p:txBody>
           <a:bodyPr wrap="none" lIns="25400" tIns="25400" rIns="25400" bIns="25400" rtlCol="0" anchor="t">
-            <a:normAutofit/>
+            <a:normAutofit lnSpcReduction="10000"/>
           </a:bodyPr>
           <a:lstStyle/>
           <a:p>
@@ -9998,7 +10029,7 @@
         </p:spPr>
         <p:txBody>
           <a:bodyPr wrap="none" lIns="25400" tIns="25400" rIns="25400" bIns="25400" rtlCol="0" anchor="t">
-            <a:normAutofit/>
+            <a:normAutofit lnSpcReduction="10000"/>
           </a:bodyPr>
           <a:lstStyle/>
           <a:p>
@@ -10072,7 +10103,7 @@
         </p:spPr>
         <p:txBody>
           <a:bodyPr wrap="none" lIns="25400" tIns="25400" rIns="25400" bIns="25400" rtlCol="0" anchor="t">
-            <a:normAutofit/>
+            <a:normAutofit lnSpcReduction="10000"/>
           </a:bodyPr>
           <a:lstStyle/>
           <a:p>
@@ -10139,7 +10170,7 @@
         </p:spPr>
         <p:txBody>
           <a:bodyPr wrap="square" lIns="25400" tIns="25400" rIns="25400" bIns="25400" rtlCol="0" anchor="t">
-            <a:normAutofit/>
+            <a:normAutofit fontScale="92500" lnSpcReduction="20000"/>
           </a:bodyPr>
           <a:lstStyle/>
           <a:p>
@@ -10237,7 +10268,7 @@
         </p:spPr>
         <p:txBody>
           <a:bodyPr wrap="square" lIns="25400" tIns="25400" rIns="25400" bIns="25400" rtlCol="0" anchor="t">
-            <a:normAutofit/>
+            <a:normAutofit fontScale="92500" lnSpcReduction="20000"/>
           </a:bodyPr>
           <a:lstStyle/>
           <a:p>
@@ -10352,7 +10383,7 @@
         </p:spPr>
         <p:txBody>
           <a:bodyPr wrap="square" lIns="25400" tIns="25400" rIns="25400" bIns="25400" rtlCol="0" anchor="t">
-            <a:normAutofit/>
+            <a:normAutofit fontScale="92500" lnSpcReduction="20000"/>
           </a:bodyPr>
           <a:lstStyle/>
           <a:p>
@@ -10440,7 +10471,7 @@
         </p:spPr>
         <p:txBody>
           <a:bodyPr wrap="square" lIns="25400" tIns="25400" rIns="25400" bIns="25400" rtlCol="0" anchor="t">
-            <a:normAutofit/>
+            <a:normAutofit fontScale="92500" lnSpcReduction="20000"/>
           </a:bodyPr>
           <a:lstStyle/>
           <a:p>
@@ -10484,7 +10515,7 @@
         </p:spPr>
         <p:txBody>
           <a:bodyPr wrap="square" lIns="25400" tIns="25400" rIns="25400" bIns="25400" rtlCol="0" anchor="t">
-            <a:normAutofit/>
+            <a:normAutofit fontScale="92500" lnSpcReduction="20000"/>
           </a:bodyPr>
           <a:lstStyle/>
           <a:p>
@@ -10528,7 +10559,7 @@
         </p:spPr>
         <p:txBody>
           <a:bodyPr wrap="square" lIns="25400" tIns="25400" rIns="25400" bIns="25400" rtlCol="0" anchor="t">
-            <a:normAutofit/>
+            <a:normAutofit fontScale="92500" lnSpcReduction="20000"/>
           </a:bodyPr>
           <a:lstStyle/>
           <a:p>
@@ -10572,7 +10603,7 @@
         </p:spPr>
         <p:txBody>
           <a:bodyPr wrap="square" lIns="25400" tIns="25400" rIns="25400" bIns="25400" rtlCol="0" anchor="t">
-            <a:normAutofit/>
+            <a:normAutofit fontScale="92500" lnSpcReduction="20000"/>
           </a:bodyPr>
           <a:lstStyle/>
           <a:p>
@@ -10616,7 +10647,7 @@
         </p:spPr>
         <p:txBody>
           <a:bodyPr wrap="none" lIns="25400" tIns="25400" rIns="25400" bIns="25400" rtlCol="0" anchor="t">
-            <a:normAutofit/>
+            <a:normAutofit lnSpcReduction="10000"/>
           </a:bodyPr>
           <a:lstStyle/>
           <a:p>
@@ -10657,7 +10688,7 @@
         </p:spPr>
         <p:txBody>
           <a:bodyPr wrap="none" lIns="25400" tIns="25400" rIns="25400" bIns="25400" rtlCol="0" anchor="t">
-            <a:normAutofit/>
+            <a:normAutofit lnSpcReduction="10000"/>
           </a:bodyPr>
           <a:lstStyle/>
           <a:p>
@@ -10731,7 +10762,7 @@
         </p:spPr>
         <p:txBody>
           <a:bodyPr wrap="none" lIns="25400" tIns="25400" rIns="25400" bIns="25400" rtlCol="0" anchor="t">
-            <a:normAutofit/>
+            <a:normAutofit lnSpcReduction="10000"/>
           </a:bodyPr>
           <a:lstStyle/>
           <a:p>
@@ -10798,7 +10829,7 @@
         </p:spPr>
         <p:txBody>
           <a:bodyPr wrap="square" lIns="25400" tIns="25400" rIns="25400" bIns="25400" rtlCol="0" anchor="t">
-            <a:normAutofit/>
+            <a:normAutofit fontScale="92500" lnSpcReduction="20000"/>
           </a:bodyPr>
           <a:lstStyle/>
           <a:p>
@@ -11058,7 +11089,7 @@
         </p:spPr>
         <p:txBody>
           <a:bodyPr wrap="square" lIns="25400" tIns="25400" rIns="25400" bIns="25400" rtlCol="0" anchor="t">
-            <a:normAutofit/>
+            <a:normAutofit lnSpcReduction="10000"/>
           </a:bodyPr>
           <a:lstStyle/>
           <a:p>
@@ -11099,7 +11130,7 @@
         </p:spPr>
         <p:txBody>
           <a:bodyPr wrap="square" lIns="25400" tIns="25400" rIns="25400" bIns="25400" rtlCol="0" anchor="t">
-            <a:normAutofit/>
+            <a:normAutofit fontScale="92500" lnSpcReduction="20000"/>
           </a:bodyPr>
           <a:lstStyle/>
           <a:p>
@@ -11170,7 +11201,7 @@
         </p:spPr>
         <p:txBody>
           <a:bodyPr wrap="square" lIns="25400" tIns="25400" rIns="25400" bIns="25400" rtlCol="0" anchor="t">
-            <a:normAutofit/>
+            <a:normAutofit lnSpcReduction="10000"/>
           </a:bodyPr>
           <a:lstStyle/>
           <a:p>
@@ -11211,7 +11242,7 @@
         </p:spPr>
         <p:txBody>
           <a:bodyPr wrap="square" lIns="25400" tIns="25400" rIns="25400" bIns="25400" rtlCol="0" anchor="t">
-            <a:normAutofit/>
+            <a:normAutofit fontScale="92500" lnSpcReduction="20000"/>
           </a:bodyPr>
           <a:lstStyle/>
           <a:p>
@@ -11282,7 +11313,7 @@
         </p:spPr>
         <p:txBody>
           <a:bodyPr wrap="square" lIns="25400" tIns="25400" rIns="25400" bIns="25400" rtlCol="0" anchor="t">
-            <a:normAutofit/>
+            <a:normAutofit lnSpcReduction="10000"/>
           </a:bodyPr>
           <a:lstStyle/>
           <a:p>
@@ -11323,7 +11354,7 @@
         </p:spPr>
         <p:txBody>
           <a:bodyPr wrap="square" lIns="25400" tIns="25400" rIns="25400" bIns="25400" rtlCol="0" anchor="t">
-            <a:normAutofit/>
+            <a:normAutofit fontScale="92500" lnSpcReduction="20000"/>
           </a:bodyPr>
           <a:lstStyle/>
           <a:p>
@@ -11394,7 +11425,7 @@
         </p:spPr>
         <p:txBody>
           <a:bodyPr wrap="square" lIns="25400" tIns="25400" rIns="25400" bIns="25400" rtlCol="0" anchor="t">
-            <a:normAutofit/>
+            <a:normAutofit lnSpcReduction="10000"/>
           </a:bodyPr>
           <a:lstStyle/>
           <a:p>
@@ -11435,7 +11466,7 @@
         </p:spPr>
         <p:txBody>
           <a:bodyPr wrap="square" lIns="25400" tIns="25400" rIns="25400" bIns="25400" rtlCol="0" anchor="t">
-            <a:normAutofit/>
+            <a:normAutofit fontScale="92500" lnSpcReduction="20000"/>
           </a:bodyPr>
           <a:lstStyle/>
           <a:p>
@@ -11479,7 +11510,7 @@
         </p:spPr>
         <p:txBody>
           <a:bodyPr wrap="none" lIns="25400" tIns="25400" rIns="25400" bIns="25400" rtlCol="0" anchor="t">
-            <a:normAutofit/>
+            <a:normAutofit lnSpcReduction="10000"/>
           </a:bodyPr>
           <a:lstStyle/>
           <a:p>
@@ -11520,7 +11551,7 @@
         </p:spPr>
         <p:txBody>
           <a:bodyPr wrap="none" lIns="25400" tIns="25400" rIns="25400" bIns="25400" rtlCol="0" anchor="t">
-            <a:normAutofit/>
+            <a:normAutofit lnSpcReduction="10000"/>
           </a:bodyPr>
           <a:lstStyle/>
           <a:p>
@@ -11594,7 +11625,7 @@
         </p:spPr>
         <p:txBody>
           <a:bodyPr wrap="none" lIns="25400" tIns="25400" rIns="25400" bIns="25400" rtlCol="0" anchor="t">
-            <a:normAutofit/>
+            <a:normAutofit lnSpcReduction="10000"/>
           </a:bodyPr>
           <a:lstStyle/>
           <a:p>
@@ -11661,7 +11692,7 @@
         </p:spPr>
         <p:txBody>
           <a:bodyPr wrap="square" lIns="25400" tIns="25400" rIns="25400" bIns="25400" rtlCol="0" anchor="t">
-            <a:normAutofit/>
+            <a:normAutofit fontScale="92500" lnSpcReduction="20000"/>
           </a:bodyPr>
           <a:lstStyle/>
           <a:p>
@@ -11732,7 +11763,7 @@
         </p:spPr>
         <p:txBody>
           <a:bodyPr wrap="square" lIns="25400" tIns="25400" rIns="25400" bIns="25400" rtlCol="0" anchor="t">
-            <a:normAutofit/>
+            <a:normAutofit fontScale="92500" lnSpcReduction="10000"/>
           </a:bodyPr>
           <a:lstStyle/>
           <a:p>
@@ -11776,7 +11807,7 @@
         </p:spPr>
         <p:txBody>
           <a:bodyPr wrap="square" lIns="25400" tIns="25400" rIns="25400" bIns="25400" rtlCol="0" anchor="t">
-            <a:normAutofit/>
+            <a:normAutofit fontScale="92500" lnSpcReduction="20000"/>
           </a:bodyPr>
           <a:lstStyle/>
           <a:p>
@@ -11820,7 +11851,7 @@
         </p:spPr>
         <p:txBody>
           <a:bodyPr wrap="square" lIns="25400" tIns="25400" rIns="25400" bIns="25400" rtlCol="0" anchor="t">
-            <a:normAutofit/>
+            <a:normAutofit fontScale="92500" lnSpcReduction="20000"/>
           </a:bodyPr>
           <a:lstStyle/>
           <a:p>
@@ -11864,7 +11895,7 @@
         </p:spPr>
         <p:txBody>
           <a:bodyPr wrap="square" lIns="25400" tIns="25400" rIns="25400" bIns="25400" rtlCol="0" anchor="t">
-            <a:normAutofit/>
+            <a:normAutofit fontScale="92500" lnSpcReduction="10000"/>
           </a:bodyPr>
           <a:lstStyle/>
           <a:p>
@@ -12065,7 +12096,7 @@
         </p:spPr>
         <p:txBody>
           <a:bodyPr wrap="square" lIns="25400" tIns="25400" rIns="25400" bIns="25400" rtlCol="0" anchor="t">
-            <a:normAutofit/>
+            <a:normAutofit lnSpcReduction="10000"/>
           </a:bodyPr>
           <a:lstStyle/>
           <a:p>
@@ -12106,7 +12137,7 @@
         </p:spPr>
         <p:txBody>
           <a:bodyPr wrap="square" lIns="25400" tIns="25400" rIns="25400" bIns="25400" rtlCol="0" anchor="t">
-            <a:normAutofit/>
+            <a:normAutofit fontScale="92500" lnSpcReduction="20000"/>
           </a:bodyPr>
           <a:lstStyle/>
           <a:p>
@@ -12172,7 +12203,7 @@
         </p:spPr>
         <p:txBody>
           <a:bodyPr wrap="square" lIns="25400" tIns="25400" rIns="25400" bIns="25400" rtlCol="0" anchor="t">
-            <a:normAutofit/>
+            <a:normAutofit fontScale="92500" lnSpcReduction="20000"/>
           </a:bodyPr>
           <a:lstStyle/>
           <a:p>
@@ -12216,7 +12247,7 @@
         </p:spPr>
         <p:txBody>
           <a:bodyPr wrap="none" lIns="25400" tIns="25400" rIns="25400" bIns="25400" rtlCol="0" anchor="t">
-            <a:normAutofit/>
+            <a:normAutofit lnSpcReduction="10000"/>
           </a:bodyPr>
           <a:lstStyle/>
           <a:p>
@@ -12257,7 +12288,7 @@
         </p:spPr>
         <p:txBody>
           <a:bodyPr wrap="none" lIns="25400" tIns="25400" rIns="25400" bIns="25400" rtlCol="0" anchor="t">
-            <a:normAutofit/>
+            <a:normAutofit lnSpcReduction="10000"/>
           </a:bodyPr>
           <a:lstStyle/>
           <a:p>
@@ -12331,7 +12362,7 @@
         </p:spPr>
         <p:txBody>
           <a:bodyPr wrap="none" lIns="25400" tIns="25400" rIns="25400" bIns="25400" rtlCol="0" anchor="t">
-            <a:normAutofit/>
+            <a:normAutofit lnSpcReduction="10000"/>
           </a:bodyPr>
           <a:lstStyle/>
           <a:p>
@@ -12398,7 +12429,7 @@
         </p:spPr>
         <p:txBody>
           <a:bodyPr wrap="square" lIns="25400" tIns="25400" rIns="25400" bIns="25400" rtlCol="0" anchor="t">
-            <a:normAutofit/>
+            <a:normAutofit fontScale="92500" lnSpcReduction="20000"/>
           </a:bodyPr>
           <a:lstStyle/>
           <a:p>
@@ -12469,7 +12500,7 @@
         </p:spPr>
         <p:txBody>
           <a:bodyPr wrap="square" lIns="25400" tIns="25400" rIns="25400" bIns="25400" rtlCol="0" anchor="t">
-            <a:normAutofit/>
+            <a:normAutofit fontScale="92500" lnSpcReduction="10000"/>
           </a:bodyPr>
           <a:lstStyle/>
           <a:p>
@@ -13041,7 +13072,7 @@
         </p:spPr>
         <p:txBody>
           <a:bodyPr wrap="none" lIns="25400" tIns="25400" rIns="25400" bIns="25400" rtlCol="0" anchor="t">
-            <a:normAutofit/>
+            <a:normAutofit lnSpcReduction="10000"/>
           </a:bodyPr>
           <a:lstStyle/>
           <a:p>
@@ -13082,7 +13113,7 @@
         </p:spPr>
         <p:txBody>
           <a:bodyPr wrap="none" lIns="25400" tIns="25400" rIns="25400" bIns="25400" rtlCol="0" anchor="t">
-            <a:normAutofit/>
+            <a:normAutofit lnSpcReduction="10000"/>
           </a:bodyPr>
           <a:lstStyle/>
           <a:p>
@@ -13216,7 +13247,7 @@
         </p:spPr>
         <p:txBody>
           <a:bodyPr wrap="none" lIns="25400" tIns="25400" rIns="25400" bIns="25400" rtlCol="0" anchor="t">
-            <a:normAutofit/>
+            <a:normAutofit lnSpcReduction="10000"/>
           </a:bodyPr>
           <a:lstStyle/>
           <a:p>
@@ -13368,7 +13399,7 @@
         </p:spPr>
         <p:txBody>
           <a:bodyPr wrap="none" lIns="25400" tIns="25400" rIns="25400" bIns="25400" rtlCol="0" anchor="t">
-            <a:normAutofit/>
+            <a:normAutofit lnSpcReduction="10000"/>
           </a:bodyPr>
           <a:lstStyle/>
           <a:p>
@@ -13435,7 +13466,7 @@
         </p:spPr>
         <p:txBody>
           <a:bodyPr wrap="square" lIns="25400" tIns="25400" rIns="25400" bIns="25400" rtlCol="0" anchor="t">
-            <a:normAutofit/>
+            <a:normAutofit fontScale="92500" lnSpcReduction="20000"/>
           </a:bodyPr>
           <a:lstStyle/>
           <a:p>
@@ -13685,7 +13716,7 @@
         </p:spPr>
         <p:txBody>
           <a:bodyPr wrap="square" lIns="25400" tIns="25400" rIns="25400" bIns="25400" rtlCol="0" anchor="t">
-            <a:normAutofit/>
+            <a:normAutofit lnSpcReduction="10000"/>
           </a:bodyPr>
           <a:lstStyle/>
           <a:p>
@@ -13726,7 +13757,7 @@
         </p:spPr>
         <p:txBody>
           <a:bodyPr wrap="square" lIns="25400" tIns="25400" rIns="25400" bIns="25400" rtlCol="0" anchor="t">
-            <a:normAutofit/>
+            <a:normAutofit fontScale="92500" lnSpcReduction="20000"/>
           </a:bodyPr>
           <a:lstStyle/>
           <a:p>
@@ -13949,7 +13980,7 @@
         </p:spPr>
         <p:txBody>
           <a:bodyPr wrap="square" lIns="25400" tIns="25400" rIns="25400" bIns="25400" rtlCol="0" anchor="t">
-            <a:normAutofit/>
+            <a:normAutofit lnSpcReduction="10000"/>
           </a:bodyPr>
           <a:lstStyle/>
           <a:p>
@@ -13990,7 +14021,7 @@
         </p:spPr>
         <p:txBody>
           <a:bodyPr wrap="square" lIns="25400" tIns="25400" rIns="25400" bIns="25400" rtlCol="0" anchor="t">
-            <a:normAutofit/>
+            <a:normAutofit fontScale="92500" lnSpcReduction="20000"/>
           </a:bodyPr>
           <a:lstStyle/>
           <a:p>
@@ -14034,7 +14065,7 @@
         </p:spPr>
         <p:txBody>
           <a:bodyPr wrap="square" lIns="25400" tIns="25400" rIns="25400" bIns="25400" rtlCol="0" anchor="t">
-            <a:normAutofit/>
+            <a:normAutofit fontScale="92500"/>
           </a:bodyPr>
           <a:lstStyle/>
           <a:p>
@@ -14213,7 +14244,7 @@
         </p:spPr>
         <p:txBody>
           <a:bodyPr wrap="square" lIns="25400" tIns="25400" rIns="25400" bIns="25400" rtlCol="0" anchor="t">
-            <a:normAutofit/>
+            <a:normAutofit lnSpcReduction="10000"/>
           </a:bodyPr>
           <a:lstStyle/>
           <a:p>
@@ -14254,7 +14285,7 @@
         </p:spPr>
         <p:txBody>
           <a:bodyPr wrap="square" lIns="25400" tIns="25400" rIns="25400" bIns="25400" rtlCol="0" anchor="t">
-            <a:normAutofit/>
+            <a:normAutofit fontScale="92500" lnSpcReduction="20000"/>
           </a:bodyPr>
           <a:lstStyle/>
           <a:p>
@@ -14298,7 +14329,7 @@
         </p:spPr>
         <p:txBody>
           <a:bodyPr wrap="square" lIns="25400" tIns="25400" rIns="25400" bIns="25400" rtlCol="0" anchor="t">
-            <a:normAutofit/>
+            <a:normAutofit fontScale="92500" lnSpcReduction="20000"/>
           </a:bodyPr>
           <a:lstStyle/>
           <a:p>
@@ -14342,7 +14373,7 @@
         </p:spPr>
         <p:txBody>
           <a:bodyPr wrap="none" lIns="25400" tIns="25400" rIns="25400" bIns="25400" rtlCol="0" anchor="t">
-            <a:normAutofit/>
+            <a:normAutofit lnSpcReduction="10000"/>
           </a:bodyPr>
           <a:lstStyle/>
           <a:p>
@@ -14383,7 +14414,7 @@
         </p:spPr>
         <p:txBody>
           <a:bodyPr wrap="none" lIns="25400" tIns="25400" rIns="25400" bIns="25400" rtlCol="0" anchor="t">
-            <a:normAutofit/>
+            <a:normAutofit lnSpcReduction="10000"/>
           </a:bodyPr>
           <a:lstStyle/>
           <a:p>
